--- a/docs/DEMO.pptx
+++ b/docs/DEMO.pptx
@@ -6,16 +6,17 @@
   </p:sldMasterIdLst>
   <p:sldIdLst>
     <p:sldId id="256" r:id="rId2"/>
-    <p:sldId id="257" r:id="rId3"/>
-    <p:sldId id="258" r:id="rId4"/>
-    <p:sldId id="259" r:id="rId5"/>
-    <p:sldId id="260" r:id="rId6"/>
-    <p:sldId id="261" r:id="rId7"/>
-    <p:sldId id="262" r:id="rId8"/>
-    <p:sldId id="263" r:id="rId9"/>
-    <p:sldId id="265" r:id="rId10"/>
-    <p:sldId id="264" r:id="rId11"/>
-    <p:sldId id="267" r:id="rId12"/>
+    <p:sldId id="268" r:id="rId3"/>
+    <p:sldId id="257" r:id="rId4"/>
+    <p:sldId id="258" r:id="rId5"/>
+    <p:sldId id="259" r:id="rId6"/>
+    <p:sldId id="260" r:id="rId7"/>
+    <p:sldId id="261" r:id="rId8"/>
+    <p:sldId id="262" r:id="rId9"/>
+    <p:sldId id="263" r:id="rId10"/>
+    <p:sldId id="265" r:id="rId11"/>
+    <p:sldId id="264" r:id="rId12"/>
+    <p:sldId id="267" r:id="rId13"/>
   </p:sldIdLst>
   <p:sldSz cx="12192000" cy="6858000"/>
   <p:notesSz cx="6858000" cy="9144000"/>
@@ -8701,6 +8702,324 @@
           <p:cNvPr id="5" name="Image 4">
             <a:extLst>
               <a:ext uri="{FF2B5EF4-FFF2-40B4-BE49-F238E27FC236}">
+                <a16:creationId xmlns:a16="http://schemas.microsoft.com/office/drawing/2014/main" id="{933BB650-94F7-40B2-89C4-285D509F99E1}"/>
+              </a:ext>
+            </a:extLst>
+          </p:cNvPr>
+          <p:cNvPicPr>
+            <a:picLocks noChangeAspect="1"/>
+          </p:cNvPicPr>
+          <p:nvPr/>
+        </p:nvPicPr>
+        <p:blipFill>
+          <a:blip r:embed="rId2">
+            <a:extLst>
+              <a:ext uri="{28A0092B-C50C-407E-A947-70E740481C1C}">
+                <a14:useLocalDpi xmlns:a14="http://schemas.microsoft.com/office/drawing/2010/main" val="0"/>
+              </a:ext>
+            </a:extLst>
+          </a:blip>
+          <a:stretch>
+            <a:fillRect/>
+          </a:stretch>
+        </p:blipFill>
+        <p:spPr>
+          <a:xfrm>
+            <a:off x="-28876" y="-1"/>
+            <a:ext cx="12226172" cy="7122696"/>
+          </a:xfrm>
+          <a:prstGeom prst="rect">
+            <a:avLst/>
+          </a:prstGeom>
+        </p:spPr>
+      </p:pic>
+      <p:sp>
+        <p:nvSpPr>
+          <p:cNvPr id="6" name="Titre 1">
+            <a:extLst>
+              <a:ext uri="{FF2B5EF4-FFF2-40B4-BE49-F238E27FC236}">
+                <a16:creationId xmlns:a16="http://schemas.microsoft.com/office/drawing/2014/main" id="{94A5A136-AE0E-4645-9CF0-E7788F0608D3}"/>
+              </a:ext>
+            </a:extLst>
+          </p:cNvPr>
+          <p:cNvSpPr txBox="1">
+            <a:spLocks/>
+          </p:cNvSpPr>
+          <p:nvPr/>
+        </p:nvSpPr>
+        <p:spPr>
+          <a:xfrm>
+            <a:off x="397380" y="3898230"/>
+            <a:ext cx="2721205" cy="1520793"/>
+          </a:xfrm>
+          <a:prstGeom prst="rect">
+            <a:avLst/>
+          </a:prstGeom>
+          <a:ln w="28575" cap="rnd" cmpd="sng" algn="ctr">
+            <a:solidFill>
+              <a:schemeClr val="accent6">
+                <a:shade val="90000"/>
+              </a:schemeClr>
+            </a:solidFill>
+            <a:prstDash val="solid"/>
+          </a:ln>
+        </p:spPr>
+        <p:style>
+          <a:lnRef idx="1">
+            <a:schemeClr val="accent6"/>
+          </a:lnRef>
+          <a:fillRef idx="2">
+            <a:schemeClr val="accent6"/>
+          </a:fillRef>
+          <a:effectRef idx="1">
+            <a:schemeClr val="accent6"/>
+          </a:effectRef>
+          <a:fontRef idx="minor">
+            <a:schemeClr val="dk1"/>
+          </a:fontRef>
+        </p:style>
+        <p:txBody>
+          <a:bodyPr vert="horz" lIns="91440" tIns="45720" rIns="91440" bIns="45720" rtlCol="0" anchor="t">
+            <a:normAutofit fontScale="97500"/>
+          </a:bodyPr>
+          <a:lstStyle>
+            <a:lvl1pPr algn="l" defTabSz="457200" rtl="0" eaLnBrk="1" latinLnBrk="0" hangingPunct="1">
+              <a:spcBef>
+                <a:spcPct val="0"/>
+              </a:spcBef>
+              <a:buNone/>
+              <a:defRPr sz="3600" kern="1200">
+                <a:solidFill>
+                  <a:schemeClr val="dk1"/>
+                </a:solidFill>
+                <a:latin typeface="+mn-lt"/>
+                <a:ea typeface="+mn-ea"/>
+                <a:cs typeface="+mn-cs"/>
+              </a:defRPr>
+            </a:lvl1pPr>
+            <a:lvl2pPr eaLnBrk="1" hangingPunct="1">
+              <a:defRPr>
+                <a:solidFill>
+                  <a:schemeClr val="dk1"/>
+                </a:solidFill>
+                <a:latin typeface="+mn-lt"/>
+                <a:ea typeface="+mn-ea"/>
+                <a:cs typeface="+mn-cs"/>
+              </a:defRPr>
+            </a:lvl2pPr>
+            <a:lvl3pPr eaLnBrk="1" hangingPunct="1">
+              <a:defRPr>
+                <a:solidFill>
+                  <a:schemeClr val="dk1"/>
+                </a:solidFill>
+                <a:latin typeface="+mn-lt"/>
+                <a:ea typeface="+mn-ea"/>
+                <a:cs typeface="+mn-cs"/>
+              </a:defRPr>
+            </a:lvl3pPr>
+            <a:lvl4pPr eaLnBrk="1" hangingPunct="1">
+              <a:defRPr>
+                <a:solidFill>
+                  <a:schemeClr val="dk1"/>
+                </a:solidFill>
+                <a:latin typeface="+mn-lt"/>
+                <a:ea typeface="+mn-ea"/>
+                <a:cs typeface="+mn-cs"/>
+              </a:defRPr>
+            </a:lvl4pPr>
+            <a:lvl5pPr eaLnBrk="1" hangingPunct="1">
+              <a:defRPr>
+                <a:solidFill>
+                  <a:schemeClr val="dk1"/>
+                </a:solidFill>
+                <a:latin typeface="+mn-lt"/>
+                <a:ea typeface="+mn-ea"/>
+                <a:cs typeface="+mn-cs"/>
+              </a:defRPr>
+            </a:lvl5pPr>
+            <a:lvl6pPr eaLnBrk="1" hangingPunct="1">
+              <a:defRPr>
+                <a:solidFill>
+                  <a:schemeClr val="dk1"/>
+                </a:solidFill>
+                <a:latin typeface="+mn-lt"/>
+                <a:ea typeface="+mn-ea"/>
+                <a:cs typeface="+mn-cs"/>
+              </a:defRPr>
+            </a:lvl6pPr>
+            <a:lvl7pPr eaLnBrk="1" hangingPunct="1">
+              <a:defRPr>
+                <a:solidFill>
+                  <a:schemeClr val="dk1"/>
+                </a:solidFill>
+                <a:latin typeface="+mn-lt"/>
+                <a:ea typeface="+mn-ea"/>
+                <a:cs typeface="+mn-cs"/>
+              </a:defRPr>
+            </a:lvl7pPr>
+            <a:lvl8pPr eaLnBrk="1" hangingPunct="1">
+              <a:defRPr>
+                <a:solidFill>
+                  <a:schemeClr val="dk1"/>
+                </a:solidFill>
+                <a:latin typeface="+mn-lt"/>
+                <a:ea typeface="+mn-ea"/>
+                <a:cs typeface="+mn-cs"/>
+              </a:defRPr>
+            </a:lvl8pPr>
+            <a:lvl9pPr eaLnBrk="1" hangingPunct="1">
+              <a:defRPr>
+                <a:solidFill>
+                  <a:schemeClr val="dk1"/>
+                </a:solidFill>
+                <a:latin typeface="+mn-lt"/>
+                <a:ea typeface="+mn-ea"/>
+                <a:cs typeface="+mn-cs"/>
+              </a:defRPr>
+            </a:lvl9pPr>
+          </a:lstStyle>
+          <a:p>
+            <a:r>
+              <a:rPr lang="fr-FR" sz="2400" dirty="0">
+                <a:ln w="0"/>
+                <a:solidFill>
+                  <a:schemeClr val="tx1"/>
+                </a:solidFill>
+                <a:effectLst>
+                  <a:outerShdw blurRad="38100" dist="19050" dir="2700000" algn="tl" rotWithShape="0">
+                    <a:schemeClr val="dk1">
+                      <a:alpha val="40000"/>
+                    </a:schemeClr>
+                  </a:outerShdw>
+                </a:effectLst>
+                <a:latin typeface="Copperplate Gothic Bold" panose="020E0705020206020404" pitchFamily="34" charset="0"/>
+              </a:rPr>
+              <a:t>Visualisation de l’historique de discussion</a:t>
+            </a:r>
+          </a:p>
+        </p:txBody>
+      </p:sp>
+    </p:spTree>
+    <p:extLst>
+      <p:ext uri="{BB962C8B-B14F-4D97-AF65-F5344CB8AC3E}">
+        <p14:creationId xmlns:p14="http://schemas.microsoft.com/office/powerpoint/2010/main" val="1622528497"/>
+      </p:ext>
+    </p:extLst>
+  </p:cSld>
+  <p:clrMapOvr>
+    <a:masterClrMapping/>
+  </p:clrMapOvr>
+  <p:timing>
+    <p:tnLst>
+      <p:par>
+        <p:cTn id="1" dur="indefinite" restart="never" nodeType="tmRoot">
+          <p:childTnLst>
+            <p:seq concurrent="1" nextAc="seek">
+              <p:cTn id="2" dur="indefinite" nodeType="mainSeq">
+                <p:childTnLst>
+                  <p:par>
+                    <p:cTn id="3" fill="hold">
+                      <p:stCondLst>
+                        <p:cond delay="indefinite"/>
+                      </p:stCondLst>
+                      <p:childTnLst>
+                        <p:par>
+                          <p:cTn id="4" fill="hold">
+                            <p:stCondLst>
+                              <p:cond delay="0"/>
+                            </p:stCondLst>
+                            <p:childTnLst>
+                              <p:par>
+                                <p:cTn id="5" presetID="21" presetClass="entr" presetSubtype="1" fill="hold" grpId="0" nodeType="clickEffect">
+                                  <p:stCondLst>
+                                    <p:cond delay="0"/>
+                                  </p:stCondLst>
+                                  <p:childTnLst>
+                                    <p:set>
+                                      <p:cBhvr>
+                                        <p:cTn id="6" dur="1" fill="hold">
+                                          <p:stCondLst>
+                                            <p:cond delay="0"/>
+                                          </p:stCondLst>
+                                        </p:cTn>
+                                        <p:tgtEl>
+                                          <p:spTgt spid="6"/>
+                                        </p:tgtEl>
+                                        <p:attrNameLst>
+                                          <p:attrName>style.visibility</p:attrName>
+                                        </p:attrNameLst>
+                                      </p:cBhvr>
+                                      <p:to>
+                                        <p:strVal val="visible"/>
+                                      </p:to>
+                                    </p:set>
+                                    <p:animEffect transition="in" filter="wheel(1)">
+                                      <p:cBhvr>
+                                        <p:cTn id="7" dur="2000"/>
+                                        <p:tgtEl>
+                                          <p:spTgt spid="6"/>
+                                        </p:tgtEl>
+                                      </p:cBhvr>
+                                    </p:animEffect>
+                                  </p:childTnLst>
+                                </p:cTn>
+                              </p:par>
+                            </p:childTnLst>
+                          </p:cTn>
+                        </p:par>
+                      </p:childTnLst>
+                    </p:cTn>
+                  </p:par>
+                </p:childTnLst>
+              </p:cTn>
+              <p:prevCondLst>
+                <p:cond evt="onPrev" delay="0">
+                  <p:tgtEl>
+                    <p:sldTgt/>
+                  </p:tgtEl>
+                </p:cond>
+              </p:prevCondLst>
+              <p:nextCondLst>
+                <p:cond evt="onNext" delay="0">
+                  <p:tgtEl>
+                    <p:sldTgt/>
+                  </p:tgtEl>
+                </p:cond>
+              </p:nextCondLst>
+            </p:seq>
+          </p:childTnLst>
+        </p:cTn>
+      </p:par>
+    </p:tnLst>
+    <p:bldLst>
+      <p:bldP spid="6" grpId="0" animBg="1"/>
+    </p:bldLst>
+  </p:timing>
+</p:sld>
+</file>
+
+<file path=ppt/slides/slide11.xml><?xml version="1.0" encoding="utf-8"?>
+<p:sld xmlns:a="http://schemas.openxmlformats.org/drawingml/2006/main" xmlns:r="http://schemas.openxmlformats.org/officeDocument/2006/relationships" xmlns:p="http://schemas.openxmlformats.org/presentationml/2006/main">
+  <p:cSld>
+    <p:spTree>
+      <p:nvGrpSpPr>
+        <p:cNvPr id="1" name=""/>
+        <p:cNvGrpSpPr/>
+        <p:nvPr/>
+      </p:nvGrpSpPr>
+      <p:grpSpPr>
+        <a:xfrm>
+          <a:off x="0" y="0"/>
+          <a:ext cx="0" cy="0"/>
+          <a:chOff x="0" y="0"/>
+          <a:chExt cx="0" cy="0"/>
+        </a:xfrm>
+      </p:grpSpPr>
+      <p:pic>
+        <p:nvPicPr>
+          <p:cNvPr id="5" name="Image 4">
+            <a:extLst>
+              <a:ext uri="{FF2B5EF4-FFF2-40B4-BE49-F238E27FC236}">
                 <a16:creationId xmlns:a16="http://schemas.microsoft.com/office/drawing/2014/main" id="{CB995EBA-84DF-44E1-AF19-9642FB0FFF35}"/>
               </a:ext>
             </a:extLst>
@@ -8997,7 +9316,7 @@
 </p:sld>
 </file>
 
-<file path=ppt/slides/slide11.xml><?xml version="1.0" encoding="utf-8"?>
+<file path=ppt/slides/slide12.xml><?xml version="1.0" encoding="utf-8"?>
 <p:sld xmlns:a="http://schemas.openxmlformats.org/drawingml/2006/main" xmlns:r="http://schemas.openxmlformats.org/officeDocument/2006/relationships" xmlns:p="http://schemas.openxmlformats.org/presentationml/2006/main">
   <p:cSld>
     <p:spTree>
@@ -9583,6 +9902,76 @@
 </file>
 
 <file path=ppt/slides/slide2.xml><?xml version="1.0" encoding="utf-8"?>
+<p:sld xmlns:a="http://schemas.openxmlformats.org/drawingml/2006/main" xmlns:r="http://schemas.openxmlformats.org/officeDocument/2006/relationships" xmlns:p="http://schemas.openxmlformats.org/presentationml/2006/main">
+  <p:cSld>
+    <p:spTree>
+      <p:nvGrpSpPr>
+        <p:cNvPr id="1" name=""/>
+        <p:cNvGrpSpPr/>
+        <p:nvPr/>
+      </p:nvGrpSpPr>
+      <p:grpSpPr>
+        <a:xfrm>
+          <a:off x="0" y="0"/>
+          <a:ext cx="0" cy="0"/>
+          <a:chOff x="0" y="0"/>
+          <a:chExt cx="0" cy="0"/>
+        </a:xfrm>
+      </p:grpSpPr>
+      <p:sp>
+        <p:nvSpPr>
+          <p:cNvPr id="3" name="Espace réservé du contenu 2">
+            <a:extLst>
+              <a:ext uri="{FF2B5EF4-FFF2-40B4-BE49-F238E27FC236}">
+                <a16:creationId xmlns:a16="http://schemas.microsoft.com/office/drawing/2014/main" id="{49B68A39-D24D-4C3C-894F-09FB4CC50C9C}"/>
+              </a:ext>
+            </a:extLst>
+          </p:cNvPr>
+          <p:cNvSpPr>
+            <a:spLocks noGrp="1"/>
+          </p:cNvSpPr>
+          <p:nvPr>
+            <p:ph idx="1"/>
+          </p:nvPr>
+        </p:nvSpPr>
+        <p:spPr>
+          <a:xfrm>
+            <a:off x="1953945" y="2917257"/>
+            <a:ext cx="8915400" cy="1023486"/>
+          </a:xfrm>
+        </p:spPr>
+        <p:txBody>
+          <a:bodyPr>
+            <a:normAutofit/>
+          </a:bodyPr>
+          <a:lstStyle/>
+          <a:p>
+            <a:pPr marL="0" indent="0" algn="ctr">
+              <a:buNone/>
+            </a:pPr>
+            <a:r>
+              <a:rPr lang="fr-FR" sz="2800" b="1" dirty="0">
+                <a:latin typeface="Arial Narrow" panose="020B0606020202030204" pitchFamily="34" charset="0"/>
+              </a:rPr>
+              <a:t>Cette démonstration est celle du fonctionnement de notre projet sur interface web.</a:t>
+            </a:r>
+          </a:p>
+        </p:txBody>
+      </p:sp>
+    </p:spTree>
+    <p:extLst>
+      <p:ext uri="{BB962C8B-B14F-4D97-AF65-F5344CB8AC3E}">
+        <p14:creationId xmlns:p14="http://schemas.microsoft.com/office/powerpoint/2010/main" val="3463489708"/>
+      </p:ext>
+    </p:extLst>
+  </p:cSld>
+  <p:clrMapOvr>
+    <a:masterClrMapping/>
+  </p:clrMapOvr>
+</p:sld>
+</file>
+
+<file path=ppt/slides/slide3.xml><?xml version="1.0" encoding="utf-8"?>
 <p:sld xmlns:a="http://schemas.openxmlformats.org/drawingml/2006/main" xmlns:r="http://schemas.openxmlformats.org/officeDocument/2006/relationships" xmlns:p="http://schemas.openxmlformats.org/presentationml/2006/main">
   <p:cSld>
     <p:spTree>
@@ -9814,7 +10203,7 @@
 </p:sld>
 </file>
 
-<file path=ppt/slides/slide3.xml><?xml version="1.0" encoding="utf-8"?>
+<file path=ppt/slides/slide4.xml><?xml version="1.0" encoding="utf-8"?>
 <p:sld xmlns:a="http://schemas.openxmlformats.org/drawingml/2006/main" xmlns:r="http://schemas.openxmlformats.org/officeDocument/2006/relationships" xmlns:p="http://schemas.openxmlformats.org/presentationml/2006/main">
   <p:cSld>
     <p:spTree>
@@ -10042,324 +10431,6 @@
     <p:extLst>
       <p:ext uri="{BB962C8B-B14F-4D97-AF65-F5344CB8AC3E}">
         <p14:creationId xmlns:p14="http://schemas.microsoft.com/office/powerpoint/2010/main" val="2345291085"/>
-      </p:ext>
-    </p:extLst>
-  </p:cSld>
-  <p:clrMapOvr>
-    <a:masterClrMapping/>
-  </p:clrMapOvr>
-  <p:timing>
-    <p:tnLst>
-      <p:par>
-        <p:cTn id="1" dur="indefinite" restart="never" nodeType="tmRoot">
-          <p:childTnLst>
-            <p:seq concurrent="1" nextAc="seek">
-              <p:cTn id="2" dur="indefinite" nodeType="mainSeq">
-                <p:childTnLst>
-                  <p:par>
-                    <p:cTn id="3" fill="hold">
-                      <p:stCondLst>
-                        <p:cond delay="indefinite"/>
-                      </p:stCondLst>
-                      <p:childTnLst>
-                        <p:par>
-                          <p:cTn id="4" fill="hold">
-                            <p:stCondLst>
-                              <p:cond delay="0"/>
-                            </p:stCondLst>
-                            <p:childTnLst>
-                              <p:par>
-                                <p:cTn id="5" presetID="21" presetClass="entr" presetSubtype="1" fill="hold" grpId="0" nodeType="clickEffect">
-                                  <p:stCondLst>
-                                    <p:cond delay="0"/>
-                                  </p:stCondLst>
-                                  <p:childTnLst>
-                                    <p:set>
-                                      <p:cBhvr>
-                                        <p:cTn id="6" dur="1" fill="hold">
-                                          <p:stCondLst>
-                                            <p:cond delay="0"/>
-                                          </p:stCondLst>
-                                        </p:cTn>
-                                        <p:tgtEl>
-                                          <p:spTgt spid="6"/>
-                                        </p:tgtEl>
-                                        <p:attrNameLst>
-                                          <p:attrName>style.visibility</p:attrName>
-                                        </p:attrNameLst>
-                                      </p:cBhvr>
-                                      <p:to>
-                                        <p:strVal val="visible"/>
-                                      </p:to>
-                                    </p:set>
-                                    <p:animEffect transition="in" filter="wheel(1)">
-                                      <p:cBhvr>
-                                        <p:cTn id="7" dur="2000"/>
-                                        <p:tgtEl>
-                                          <p:spTgt spid="6"/>
-                                        </p:tgtEl>
-                                      </p:cBhvr>
-                                    </p:animEffect>
-                                  </p:childTnLst>
-                                </p:cTn>
-                              </p:par>
-                            </p:childTnLst>
-                          </p:cTn>
-                        </p:par>
-                      </p:childTnLst>
-                    </p:cTn>
-                  </p:par>
-                </p:childTnLst>
-              </p:cTn>
-              <p:prevCondLst>
-                <p:cond evt="onPrev" delay="0">
-                  <p:tgtEl>
-                    <p:sldTgt/>
-                  </p:tgtEl>
-                </p:cond>
-              </p:prevCondLst>
-              <p:nextCondLst>
-                <p:cond evt="onNext" delay="0">
-                  <p:tgtEl>
-                    <p:sldTgt/>
-                  </p:tgtEl>
-                </p:cond>
-              </p:nextCondLst>
-            </p:seq>
-          </p:childTnLst>
-        </p:cTn>
-      </p:par>
-    </p:tnLst>
-    <p:bldLst>
-      <p:bldP spid="6" grpId="0" animBg="1"/>
-    </p:bldLst>
-  </p:timing>
-</p:sld>
-</file>
-
-<file path=ppt/slides/slide4.xml><?xml version="1.0" encoding="utf-8"?>
-<p:sld xmlns:a="http://schemas.openxmlformats.org/drawingml/2006/main" xmlns:r="http://schemas.openxmlformats.org/officeDocument/2006/relationships" xmlns:p="http://schemas.openxmlformats.org/presentationml/2006/main">
-  <p:cSld>
-    <p:spTree>
-      <p:nvGrpSpPr>
-        <p:cNvPr id="1" name=""/>
-        <p:cNvGrpSpPr/>
-        <p:nvPr/>
-      </p:nvGrpSpPr>
-      <p:grpSpPr>
-        <a:xfrm>
-          <a:off x="0" y="0"/>
-          <a:ext cx="0" cy="0"/>
-          <a:chOff x="0" y="0"/>
-          <a:chExt cx="0" cy="0"/>
-        </a:xfrm>
-      </p:grpSpPr>
-      <p:pic>
-        <p:nvPicPr>
-          <p:cNvPr id="5" name="Image 4">
-            <a:extLst>
-              <a:ext uri="{FF2B5EF4-FFF2-40B4-BE49-F238E27FC236}">
-                <a16:creationId xmlns:a16="http://schemas.microsoft.com/office/drawing/2014/main" id="{23FF8458-A98C-4922-8430-B4C6C8CE42ED}"/>
-              </a:ext>
-            </a:extLst>
-          </p:cNvPr>
-          <p:cNvPicPr>
-            <a:picLocks noChangeAspect="1"/>
-          </p:cNvPicPr>
-          <p:nvPr/>
-        </p:nvPicPr>
-        <p:blipFill>
-          <a:blip r:embed="rId2">
-            <a:extLst>
-              <a:ext uri="{28A0092B-C50C-407E-A947-70E740481C1C}">
-                <a14:useLocalDpi xmlns:a14="http://schemas.microsoft.com/office/drawing/2010/main" val="0"/>
-              </a:ext>
-            </a:extLst>
-          </a:blip>
-          <a:stretch>
-            <a:fillRect/>
-          </a:stretch>
-        </p:blipFill>
-        <p:spPr>
-          <a:xfrm>
-            <a:off x="4536" y="0"/>
-            <a:ext cx="12155259" cy="6858000"/>
-          </a:xfrm>
-          <a:prstGeom prst="rect">
-            <a:avLst/>
-          </a:prstGeom>
-        </p:spPr>
-      </p:pic>
-      <p:sp>
-        <p:nvSpPr>
-          <p:cNvPr id="6" name="Titre 1">
-            <a:extLst>
-              <a:ext uri="{FF2B5EF4-FFF2-40B4-BE49-F238E27FC236}">
-                <a16:creationId xmlns:a16="http://schemas.microsoft.com/office/drawing/2014/main" id="{CFE7F09F-CF6C-414B-9FA9-B066DE016E8E}"/>
-              </a:ext>
-            </a:extLst>
-          </p:cNvPr>
-          <p:cNvSpPr txBox="1">
-            <a:spLocks/>
-          </p:cNvSpPr>
-          <p:nvPr/>
-        </p:nvSpPr>
-        <p:spPr>
-          <a:xfrm>
-            <a:off x="3570973" y="2704699"/>
-            <a:ext cx="3686475" cy="1337912"/>
-          </a:xfrm>
-          <a:prstGeom prst="rect">
-            <a:avLst/>
-          </a:prstGeom>
-          <a:ln w="28575" cap="rnd" cmpd="sng" algn="ctr">
-            <a:solidFill>
-              <a:schemeClr val="accent6">
-                <a:shade val="90000"/>
-              </a:schemeClr>
-            </a:solidFill>
-            <a:prstDash val="solid"/>
-          </a:ln>
-        </p:spPr>
-        <p:style>
-          <a:lnRef idx="1">
-            <a:schemeClr val="accent6"/>
-          </a:lnRef>
-          <a:fillRef idx="2">
-            <a:schemeClr val="accent6"/>
-          </a:fillRef>
-          <a:effectRef idx="1">
-            <a:schemeClr val="accent6"/>
-          </a:effectRef>
-          <a:fontRef idx="minor">
-            <a:schemeClr val="dk1"/>
-          </a:fontRef>
-        </p:style>
-        <p:txBody>
-          <a:bodyPr vert="horz" lIns="91440" tIns="45720" rIns="91440" bIns="45720" rtlCol="0" anchor="t">
-            <a:normAutofit fontScale="90000" lnSpcReduction="10000"/>
-          </a:bodyPr>
-          <a:lstStyle>
-            <a:lvl1pPr algn="l" defTabSz="457200" rtl="0" eaLnBrk="1" latinLnBrk="0" hangingPunct="1">
-              <a:spcBef>
-                <a:spcPct val="0"/>
-              </a:spcBef>
-              <a:buNone/>
-              <a:defRPr sz="3600" kern="1200">
-                <a:solidFill>
-                  <a:schemeClr val="dk1"/>
-                </a:solidFill>
-                <a:latin typeface="+mn-lt"/>
-                <a:ea typeface="+mn-ea"/>
-                <a:cs typeface="+mn-cs"/>
-              </a:defRPr>
-            </a:lvl1pPr>
-            <a:lvl2pPr eaLnBrk="1" hangingPunct="1">
-              <a:defRPr>
-                <a:solidFill>
-                  <a:schemeClr val="dk1"/>
-                </a:solidFill>
-                <a:latin typeface="+mn-lt"/>
-                <a:ea typeface="+mn-ea"/>
-                <a:cs typeface="+mn-cs"/>
-              </a:defRPr>
-            </a:lvl2pPr>
-            <a:lvl3pPr eaLnBrk="1" hangingPunct="1">
-              <a:defRPr>
-                <a:solidFill>
-                  <a:schemeClr val="dk1"/>
-                </a:solidFill>
-                <a:latin typeface="+mn-lt"/>
-                <a:ea typeface="+mn-ea"/>
-                <a:cs typeface="+mn-cs"/>
-              </a:defRPr>
-            </a:lvl3pPr>
-            <a:lvl4pPr eaLnBrk="1" hangingPunct="1">
-              <a:defRPr>
-                <a:solidFill>
-                  <a:schemeClr val="dk1"/>
-                </a:solidFill>
-                <a:latin typeface="+mn-lt"/>
-                <a:ea typeface="+mn-ea"/>
-                <a:cs typeface="+mn-cs"/>
-              </a:defRPr>
-            </a:lvl4pPr>
-            <a:lvl5pPr eaLnBrk="1" hangingPunct="1">
-              <a:defRPr>
-                <a:solidFill>
-                  <a:schemeClr val="dk1"/>
-                </a:solidFill>
-                <a:latin typeface="+mn-lt"/>
-                <a:ea typeface="+mn-ea"/>
-                <a:cs typeface="+mn-cs"/>
-              </a:defRPr>
-            </a:lvl5pPr>
-            <a:lvl6pPr eaLnBrk="1" hangingPunct="1">
-              <a:defRPr>
-                <a:solidFill>
-                  <a:schemeClr val="dk1"/>
-                </a:solidFill>
-                <a:latin typeface="+mn-lt"/>
-                <a:ea typeface="+mn-ea"/>
-                <a:cs typeface="+mn-cs"/>
-              </a:defRPr>
-            </a:lvl6pPr>
-            <a:lvl7pPr eaLnBrk="1" hangingPunct="1">
-              <a:defRPr>
-                <a:solidFill>
-                  <a:schemeClr val="dk1"/>
-                </a:solidFill>
-                <a:latin typeface="+mn-lt"/>
-                <a:ea typeface="+mn-ea"/>
-                <a:cs typeface="+mn-cs"/>
-              </a:defRPr>
-            </a:lvl7pPr>
-            <a:lvl8pPr eaLnBrk="1" hangingPunct="1">
-              <a:defRPr>
-                <a:solidFill>
-                  <a:schemeClr val="dk1"/>
-                </a:solidFill>
-                <a:latin typeface="+mn-lt"/>
-                <a:ea typeface="+mn-ea"/>
-                <a:cs typeface="+mn-cs"/>
-              </a:defRPr>
-            </a:lvl8pPr>
-            <a:lvl9pPr eaLnBrk="1" hangingPunct="1">
-              <a:defRPr>
-                <a:solidFill>
-                  <a:schemeClr val="dk1"/>
-                </a:solidFill>
-                <a:latin typeface="+mn-lt"/>
-                <a:ea typeface="+mn-ea"/>
-                <a:cs typeface="+mn-cs"/>
-              </a:defRPr>
-            </a:lvl9pPr>
-          </a:lstStyle>
-          <a:p>
-            <a:r>
-              <a:rPr lang="fr-FR" sz="2400" dirty="0">
-                <a:ln w="0"/>
-                <a:solidFill>
-                  <a:schemeClr val="tx1"/>
-                </a:solidFill>
-                <a:effectLst>
-                  <a:outerShdw blurRad="38100" dist="19050" dir="2700000" algn="tl" rotWithShape="0">
-                    <a:schemeClr val="dk1">
-                      <a:alpha val="40000"/>
-                    </a:schemeClr>
-                  </a:outerShdw>
-                </a:effectLst>
-                <a:latin typeface="Copperplate Gothic Bold" panose="020E0705020206020404" pitchFamily="34" charset="0"/>
-              </a:rPr>
-              <a:t>Illustration d’une Conversation naturelle avec le modèle (sans url)</a:t>
-            </a:r>
-          </a:p>
-        </p:txBody>
-      </p:sp>
-    </p:spTree>
-    <p:extLst>
-      <p:ext uri="{BB962C8B-B14F-4D97-AF65-F5344CB8AC3E}">
-        <p14:creationId xmlns:p14="http://schemas.microsoft.com/office/powerpoint/2010/main" val="2402320339"/>
       </p:ext>
     </p:extLst>
   </p:cSld>
@@ -10477,6 +10548,324 @@
           <p:cNvPr id="5" name="Image 4">
             <a:extLst>
               <a:ext uri="{FF2B5EF4-FFF2-40B4-BE49-F238E27FC236}">
+                <a16:creationId xmlns:a16="http://schemas.microsoft.com/office/drawing/2014/main" id="{23FF8458-A98C-4922-8430-B4C6C8CE42ED}"/>
+              </a:ext>
+            </a:extLst>
+          </p:cNvPr>
+          <p:cNvPicPr>
+            <a:picLocks noChangeAspect="1"/>
+          </p:cNvPicPr>
+          <p:nvPr/>
+        </p:nvPicPr>
+        <p:blipFill>
+          <a:blip r:embed="rId2">
+            <a:extLst>
+              <a:ext uri="{28A0092B-C50C-407E-A947-70E740481C1C}">
+                <a14:useLocalDpi xmlns:a14="http://schemas.microsoft.com/office/drawing/2010/main" val="0"/>
+              </a:ext>
+            </a:extLst>
+          </a:blip>
+          <a:stretch>
+            <a:fillRect/>
+          </a:stretch>
+        </p:blipFill>
+        <p:spPr>
+          <a:xfrm>
+            <a:off x="4536" y="0"/>
+            <a:ext cx="12155259" cy="6858000"/>
+          </a:xfrm>
+          <a:prstGeom prst="rect">
+            <a:avLst/>
+          </a:prstGeom>
+        </p:spPr>
+      </p:pic>
+      <p:sp>
+        <p:nvSpPr>
+          <p:cNvPr id="6" name="Titre 1">
+            <a:extLst>
+              <a:ext uri="{FF2B5EF4-FFF2-40B4-BE49-F238E27FC236}">
+                <a16:creationId xmlns:a16="http://schemas.microsoft.com/office/drawing/2014/main" id="{CFE7F09F-CF6C-414B-9FA9-B066DE016E8E}"/>
+              </a:ext>
+            </a:extLst>
+          </p:cNvPr>
+          <p:cNvSpPr txBox="1">
+            <a:spLocks/>
+          </p:cNvSpPr>
+          <p:nvPr/>
+        </p:nvSpPr>
+        <p:spPr>
+          <a:xfrm>
+            <a:off x="3570973" y="2704699"/>
+            <a:ext cx="3686475" cy="1337912"/>
+          </a:xfrm>
+          <a:prstGeom prst="rect">
+            <a:avLst/>
+          </a:prstGeom>
+          <a:ln w="28575" cap="rnd" cmpd="sng" algn="ctr">
+            <a:solidFill>
+              <a:schemeClr val="accent6">
+                <a:shade val="90000"/>
+              </a:schemeClr>
+            </a:solidFill>
+            <a:prstDash val="solid"/>
+          </a:ln>
+        </p:spPr>
+        <p:style>
+          <a:lnRef idx="1">
+            <a:schemeClr val="accent6"/>
+          </a:lnRef>
+          <a:fillRef idx="2">
+            <a:schemeClr val="accent6"/>
+          </a:fillRef>
+          <a:effectRef idx="1">
+            <a:schemeClr val="accent6"/>
+          </a:effectRef>
+          <a:fontRef idx="minor">
+            <a:schemeClr val="dk1"/>
+          </a:fontRef>
+        </p:style>
+        <p:txBody>
+          <a:bodyPr vert="horz" lIns="91440" tIns="45720" rIns="91440" bIns="45720" rtlCol="0" anchor="t">
+            <a:normAutofit fontScale="90000" lnSpcReduction="10000"/>
+          </a:bodyPr>
+          <a:lstStyle>
+            <a:lvl1pPr algn="l" defTabSz="457200" rtl="0" eaLnBrk="1" latinLnBrk="0" hangingPunct="1">
+              <a:spcBef>
+                <a:spcPct val="0"/>
+              </a:spcBef>
+              <a:buNone/>
+              <a:defRPr sz="3600" kern="1200">
+                <a:solidFill>
+                  <a:schemeClr val="dk1"/>
+                </a:solidFill>
+                <a:latin typeface="+mn-lt"/>
+                <a:ea typeface="+mn-ea"/>
+                <a:cs typeface="+mn-cs"/>
+              </a:defRPr>
+            </a:lvl1pPr>
+            <a:lvl2pPr eaLnBrk="1" hangingPunct="1">
+              <a:defRPr>
+                <a:solidFill>
+                  <a:schemeClr val="dk1"/>
+                </a:solidFill>
+                <a:latin typeface="+mn-lt"/>
+                <a:ea typeface="+mn-ea"/>
+                <a:cs typeface="+mn-cs"/>
+              </a:defRPr>
+            </a:lvl2pPr>
+            <a:lvl3pPr eaLnBrk="1" hangingPunct="1">
+              <a:defRPr>
+                <a:solidFill>
+                  <a:schemeClr val="dk1"/>
+                </a:solidFill>
+                <a:latin typeface="+mn-lt"/>
+                <a:ea typeface="+mn-ea"/>
+                <a:cs typeface="+mn-cs"/>
+              </a:defRPr>
+            </a:lvl3pPr>
+            <a:lvl4pPr eaLnBrk="1" hangingPunct="1">
+              <a:defRPr>
+                <a:solidFill>
+                  <a:schemeClr val="dk1"/>
+                </a:solidFill>
+                <a:latin typeface="+mn-lt"/>
+                <a:ea typeface="+mn-ea"/>
+                <a:cs typeface="+mn-cs"/>
+              </a:defRPr>
+            </a:lvl4pPr>
+            <a:lvl5pPr eaLnBrk="1" hangingPunct="1">
+              <a:defRPr>
+                <a:solidFill>
+                  <a:schemeClr val="dk1"/>
+                </a:solidFill>
+                <a:latin typeface="+mn-lt"/>
+                <a:ea typeface="+mn-ea"/>
+                <a:cs typeface="+mn-cs"/>
+              </a:defRPr>
+            </a:lvl5pPr>
+            <a:lvl6pPr eaLnBrk="1" hangingPunct="1">
+              <a:defRPr>
+                <a:solidFill>
+                  <a:schemeClr val="dk1"/>
+                </a:solidFill>
+                <a:latin typeface="+mn-lt"/>
+                <a:ea typeface="+mn-ea"/>
+                <a:cs typeface="+mn-cs"/>
+              </a:defRPr>
+            </a:lvl6pPr>
+            <a:lvl7pPr eaLnBrk="1" hangingPunct="1">
+              <a:defRPr>
+                <a:solidFill>
+                  <a:schemeClr val="dk1"/>
+                </a:solidFill>
+                <a:latin typeface="+mn-lt"/>
+                <a:ea typeface="+mn-ea"/>
+                <a:cs typeface="+mn-cs"/>
+              </a:defRPr>
+            </a:lvl7pPr>
+            <a:lvl8pPr eaLnBrk="1" hangingPunct="1">
+              <a:defRPr>
+                <a:solidFill>
+                  <a:schemeClr val="dk1"/>
+                </a:solidFill>
+                <a:latin typeface="+mn-lt"/>
+                <a:ea typeface="+mn-ea"/>
+                <a:cs typeface="+mn-cs"/>
+              </a:defRPr>
+            </a:lvl8pPr>
+            <a:lvl9pPr eaLnBrk="1" hangingPunct="1">
+              <a:defRPr>
+                <a:solidFill>
+                  <a:schemeClr val="dk1"/>
+                </a:solidFill>
+                <a:latin typeface="+mn-lt"/>
+                <a:ea typeface="+mn-ea"/>
+                <a:cs typeface="+mn-cs"/>
+              </a:defRPr>
+            </a:lvl9pPr>
+          </a:lstStyle>
+          <a:p>
+            <a:r>
+              <a:rPr lang="fr-FR" sz="2400" dirty="0">
+                <a:ln w="0"/>
+                <a:solidFill>
+                  <a:schemeClr val="tx1"/>
+                </a:solidFill>
+                <a:effectLst>
+                  <a:outerShdw blurRad="38100" dist="19050" dir="2700000" algn="tl" rotWithShape="0">
+                    <a:schemeClr val="dk1">
+                      <a:alpha val="40000"/>
+                    </a:schemeClr>
+                  </a:outerShdw>
+                </a:effectLst>
+                <a:latin typeface="Copperplate Gothic Bold" panose="020E0705020206020404" pitchFamily="34" charset="0"/>
+              </a:rPr>
+              <a:t>Illustration d’une Conversation naturelle avec le modèle (sans url)</a:t>
+            </a:r>
+          </a:p>
+        </p:txBody>
+      </p:sp>
+    </p:spTree>
+    <p:extLst>
+      <p:ext uri="{BB962C8B-B14F-4D97-AF65-F5344CB8AC3E}">
+        <p14:creationId xmlns:p14="http://schemas.microsoft.com/office/powerpoint/2010/main" val="2402320339"/>
+      </p:ext>
+    </p:extLst>
+  </p:cSld>
+  <p:clrMapOvr>
+    <a:masterClrMapping/>
+  </p:clrMapOvr>
+  <p:timing>
+    <p:tnLst>
+      <p:par>
+        <p:cTn id="1" dur="indefinite" restart="never" nodeType="tmRoot">
+          <p:childTnLst>
+            <p:seq concurrent="1" nextAc="seek">
+              <p:cTn id="2" dur="indefinite" nodeType="mainSeq">
+                <p:childTnLst>
+                  <p:par>
+                    <p:cTn id="3" fill="hold">
+                      <p:stCondLst>
+                        <p:cond delay="indefinite"/>
+                      </p:stCondLst>
+                      <p:childTnLst>
+                        <p:par>
+                          <p:cTn id="4" fill="hold">
+                            <p:stCondLst>
+                              <p:cond delay="0"/>
+                            </p:stCondLst>
+                            <p:childTnLst>
+                              <p:par>
+                                <p:cTn id="5" presetID="21" presetClass="entr" presetSubtype="1" fill="hold" grpId="0" nodeType="clickEffect">
+                                  <p:stCondLst>
+                                    <p:cond delay="0"/>
+                                  </p:stCondLst>
+                                  <p:childTnLst>
+                                    <p:set>
+                                      <p:cBhvr>
+                                        <p:cTn id="6" dur="1" fill="hold">
+                                          <p:stCondLst>
+                                            <p:cond delay="0"/>
+                                          </p:stCondLst>
+                                        </p:cTn>
+                                        <p:tgtEl>
+                                          <p:spTgt spid="6"/>
+                                        </p:tgtEl>
+                                        <p:attrNameLst>
+                                          <p:attrName>style.visibility</p:attrName>
+                                        </p:attrNameLst>
+                                      </p:cBhvr>
+                                      <p:to>
+                                        <p:strVal val="visible"/>
+                                      </p:to>
+                                    </p:set>
+                                    <p:animEffect transition="in" filter="wheel(1)">
+                                      <p:cBhvr>
+                                        <p:cTn id="7" dur="2000"/>
+                                        <p:tgtEl>
+                                          <p:spTgt spid="6"/>
+                                        </p:tgtEl>
+                                      </p:cBhvr>
+                                    </p:animEffect>
+                                  </p:childTnLst>
+                                </p:cTn>
+                              </p:par>
+                            </p:childTnLst>
+                          </p:cTn>
+                        </p:par>
+                      </p:childTnLst>
+                    </p:cTn>
+                  </p:par>
+                </p:childTnLst>
+              </p:cTn>
+              <p:prevCondLst>
+                <p:cond evt="onPrev" delay="0">
+                  <p:tgtEl>
+                    <p:sldTgt/>
+                  </p:tgtEl>
+                </p:cond>
+              </p:prevCondLst>
+              <p:nextCondLst>
+                <p:cond evt="onNext" delay="0">
+                  <p:tgtEl>
+                    <p:sldTgt/>
+                  </p:tgtEl>
+                </p:cond>
+              </p:nextCondLst>
+            </p:seq>
+          </p:childTnLst>
+        </p:cTn>
+      </p:par>
+    </p:tnLst>
+    <p:bldLst>
+      <p:bldP spid="6" grpId="0" animBg="1"/>
+    </p:bldLst>
+  </p:timing>
+</p:sld>
+</file>
+
+<file path=ppt/slides/slide6.xml><?xml version="1.0" encoding="utf-8"?>
+<p:sld xmlns:a="http://schemas.openxmlformats.org/drawingml/2006/main" xmlns:r="http://schemas.openxmlformats.org/officeDocument/2006/relationships" xmlns:p="http://schemas.openxmlformats.org/presentationml/2006/main">
+  <p:cSld>
+    <p:spTree>
+      <p:nvGrpSpPr>
+        <p:cNvPr id="1" name=""/>
+        <p:cNvGrpSpPr/>
+        <p:nvPr/>
+      </p:nvGrpSpPr>
+      <p:grpSpPr>
+        <a:xfrm>
+          <a:off x="0" y="0"/>
+          <a:ext cx="0" cy="0"/>
+          <a:chOff x="0" y="0"/>
+          <a:chExt cx="0" cy="0"/>
+        </a:xfrm>
+      </p:grpSpPr>
+      <p:pic>
+        <p:nvPicPr>
+          <p:cNvPr id="5" name="Image 4">
+            <a:extLst>
+              <a:ext uri="{FF2B5EF4-FFF2-40B4-BE49-F238E27FC236}">
                 <a16:creationId xmlns:a16="http://schemas.microsoft.com/office/drawing/2014/main" id="{CFC714A9-6A30-48E8-8E10-7FF46E8647C7}"/>
               </a:ext>
             </a:extLst>
@@ -10809,7 +11198,7 @@
 </p:sld>
 </file>
 
-<file path=ppt/slides/slide6.xml><?xml version="1.0" encoding="utf-8"?>
+<file path=ppt/slides/slide7.xml><?xml version="1.0" encoding="utf-8"?>
 <p:sld xmlns:a="http://schemas.openxmlformats.org/drawingml/2006/main" xmlns:r="http://schemas.openxmlformats.org/officeDocument/2006/relationships" xmlns:p="http://schemas.openxmlformats.org/presentationml/2006/main">
   <p:cSld>
     <p:spTree>
@@ -11127,7 +11516,7 @@
 </p:sld>
 </file>
 
-<file path=ppt/slides/slide7.xml><?xml version="1.0" encoding="utf-8"?>
+<file path=ppt/slides/slide8.xml><?xml version="1.0" encoding="utf-8"?>
 <p:sld xmlns:a="http://schemas.openxmlformats.org/drawingml/2006/main" xmlns:r="http://schemas.openxmlformats.org/officeDocument/2006/relationships" xmlns:p="http://schemas.openxmlformats.org/presentationml/2006/main">
   <p:cSld>
     <p:spTree>
@@ -11514,7 +11903,7 @@
 </p:sld>
 </file>
 
-<file path=ppt/slides/slide8.xml><?xml version="1.0" encoding="utf-8"?>
+<file path=ppt/slides/slide9.xml><?xml version="1.0" encoding="utf-8"?>
 <p:sld xmlns:a="http://schemas.openxmlformats.org/drawingml/2006/main" xmlns:r="http://schemas.openxmlformats.org/officeDocument/2006/relationships" xmlns:p="http://schemas.openxmlformats.org/presentationml/2006/main">
   <p:cSld>
     <p:spTree>
@@ -11772,324 +12161,6 @@
     <p:extLst>
       <p:ext uri="{BB962C8B-B14F-4D97-AF65-F5344CB8AC3E}">
         <p14:creationId xmlns:p14="http://schemas.microsoft.com/office/powerpoint/2010/main" val="2037860380"/>
-      </p:ext>
-    </p:extLst>
-  </p:cSld>
-  <p:clrMapOvr>
-    <a:masterClrMapping/>
-  </p:clrMapOvr>
-  <p:timing>
-    <p:tnLst>
-      <p:par>
-        <p:cTn id="1" dur="indefinite" restart="never" nodeType="tmRoot">
-          <p:childTnLst>
-            <p:seq concurrent="1" nextAc="seek">
-              <p:cTn id="2" dur="indefinite" nodeType="mainSeq">
-                <p:childTnLst>
-                  <p:par>
-                    <p:cTn id="3" fill="hold">
-                      <p:stCondLst>
-                        <p:cond delay="indefinite"/>
-                      </p:stCondLst>
-                      <p:childTnLst>
-                        <p:par>
-                          <p:cTn id="4" fill="hold">
-                            <p:stCondLst>
-                              <p:cond delay="0"/>
-                            </p:stCondLst>
-                            <p:childTnLst>
-                              <p:par>
-                                <p:cTn id="5" presetID="21" presetClass="entr" presetSubtype="1" fill="hold" grpId="0" nodeType="clickEffect">
-                                  <p:stCondLst>
-                                    <p:cond delay="0"/>
-                                  </p:stCondLst>
-                                  <p:childTnLst>
-                                    <p:set>
-                                      <p:cBhvr>
-                                        <p:cTn id="6" dur="1" fill="hold">
-                                          <p:stCondLst>
-                                            <p:cond delay="0"/>
-                                          </p:stCondLst>
-                                        </p:cTn>
-                                        <p:tgtEl>
-                                          <p:spTgt spid="6"/>
-                                        </p:tgtEl>
-                                        <p:attrNameLst>
-                                          <p:attrName>style.visibility</p:attrName>
-                                        </p:attrNameLst>
-                                      </p:cBhvr>
-                                      <p:to>
-                                        <p:strVal val="visible"/>
-                                      </p:to>
-                                    </p:set>
-                                    <p:animEffect transition="in" filter="wheel(1)">
-                                      <p:cBhvr>
-                                        <p:cTn id="7" dur="2000"/>
-                                        <p:tgtEl>
-                                          <p:spTgt spid="6"/>
-                                        </p:tgtEl>
-                                      </p:cBhvr>
-                                    </p:animEffect>
-                                  </p:childTnLst>
-                                </p:cTn>
-                              </p:par>
-                            </p:childTnLst>
-                          </p:cTn>
-                        </p:par>
-                      </p:childTnLst>
-                    </p:cTn>
-                  </p:par>
-                </p:childTnLst>
-              </p:cTn>
-              <p:prevCondLst>
-                <p:cond evt="onPrev" delay="0">
-                  <p:tgtEl>
-                    <p:sldTgt/>
-                  </p:tgtEl>
-                </p:cond>
-              </p:prevCondLst>
-              <p:nextCondLst>
-                <p:cond evt="onNext" delay="0">
-                  <p:tgtEl>
-                    <p:sldTgt/>
-                  </p:tgtEl>
-                </p:cond>
-              </p:nextCondLst>
-            </p:seq>
-          </p:childTnLst>
-        </p:cTn>
-      </p:par>
-    </p:tnLst>
-    <p:bldLst>
-      <p:bldP spid="6" grpId="0" animBg="1"/>
-    </p:bldLst>
-  </p:timing>
-</p:sld>
-</file>
-
-<file path=ppt/slides/slide9.xml><?xml version="1.0" encoding="utf-8"?>
-<p:sld xmlns:a="http://schemas.openxmlformats.org/drawingml/2006/main" xmlns:r="http://schemas.openxmlformats.org/officeDocument/2006/relationships" xmlns:p="http://schemas.openxmlformats.org/presentationml/2006/main">
-  <p:cSld>
-    <p:spTree>
-      <p:nvGrpSpPr>
-        <p:cNvPr id="1" name=""/>
-        <p:cNvGrpSpPr/>
-        <p:nvPr/>
-      </p:nvGrpSpPr>
-      <p:grpSpPr>
-        <a:xfrm>
-          <a:off x="0" y="0"/>
-          <a:ext cx="0" cy="0"/>
-          <a:chOff x="0" y="0"/>
-          <a:chExt cx="0" cy="0"/>
-        </a:xfrm>
-      </p:grpSpPr>
-      <p:pic>
-        <p:nvPicPr>
-          <p:cNvPr id="5" name="Image 4">
-            <a:extLst>
-              <a:ext uri="{FF2B5EF4-FFF2-40B4-BE49-F238E27FC236}">
-                <a16:creationId xmlns:a16="http://schemas.microsoft.com/office/drawing/2014/main" id="{933BB650-94F7-40B2-89C4-285D509F99E1}"/>
-              </a:ext>
-            </a:extLst>
-          </p:cNvPr>
-          <p:cNvPicPr>
-            <a:picLocks noChangeAspect="1"/>
-          </p:cNvPicPr>
-          <p:nvPr/>
-        </p:nvPicPr>
-        <p:blipFill>
-          <a:blip r:embed="rId2">
-            <a:extLst>
-              <a:ext uri="{28A0092B-C50C-407E-A947-70E740481C1C}">
-                <a14:useLocalDpi xmlns:a14="http://schemas.microsoft.com/office/drawing/2010/main" val="0"/>
-              </a:ext>
-            </a:extLst>
-          </a:blip>
-          <a:stretch>
-            <a:fillRect/>
-          </a:stretch>
-        </p:blipFill>
-        <p:spPr>
-          <a:xfrm>
-            <a:off x="-28876" y="-1"/>
-            <a:ext cx="12226172" cy="7122696"/>
-          </a:xfrm>
-          <a:prstGeom prst="rect">
-            <a:avLst/>
-          </a:prstGeom>
-        </p:spPr>
-      </p:pic>
-      <p:sp>
-        <p:nvSpPr>
-          <p:cNvPr id="6" name="Titre 1">
-            <a:extLst>
-              <a:ext uri="{FF2B5EF4-FFF2-40B4-BE49-F238E27FC236}">
-                <a16:creationId xmlns:a16="http://schemas.microsoft.com/office/drawing/2014/main" id="{94A5A136-AE0E-4645-9CF0-E7788F0608D3}"/>
-              </a:ext>
-            </a:extLst>
-          </p:cNvPr>
-          <p:cNvSpPr txBox="1">
-            <a:spLocks/>
-          </p:cNvSpPr>
-          <p:nvPr/>
-        </p:nvSpPr>
-        <p:spPr>
-          <a:xfrm>
-            <a:off x="397380" y="3898230"/>
-            <a:ext cx="2721205" cy="1520793"/>
-          </a:xfrm>
-          <a:prstGeom prst="rect">
-            <a:avLst/>
-          </a:prstGeom>
-          <a:ln w="28575" cap="rnd" cmpd="sng" algn="ctr">
-            <a:solidFill>
-              <a:schemeClr val="accent6">
-                <a:shade val="90000"/>
-              </a:schemeClr>
-            </a:solidFill>
-            <a:prstDash val="solid"/>
-          </a:ln>
-        </p:spPr>
-        <p:style>
-          <a:lnRef idx="1">
-            <a:schemeClr val="accent6"/>
-          </a:lnRef>
-          <a:fillRef idx="2">
-            <a:schemeClr val="accent6"/>
-          </a:fillRef>
-          <a:effectRef idx="1">
-            <a:schemeClr val="accent6"/>
-          </a:effectRef>
-          <a:fontRef idx="minor">
-            <a:schemeClr val="dk1"/>
-          </a:fontRef>
-        </p:style>
-        <p:txBody>
-          <a:bodyPr vert="horz" lIns="91440" tIns="45720" rIns="91440" bIns="45720" rtlCol="0" anchor="t">
-            <a:normAutofit fontScale="97500"/>
-          </a:bodyPr>
-          <a:lstStyle>
-            <a:lvl1pPr algn="l" defTabSz="457200" rtl="0" eaLnBrk="1" latinLnBrk="0" hangingPunct="1">
-              <a:spcBef>
-                <a:spcPct val="0"/>
-              </a:spcBef>
-              <a:buNone/>
-              <a:defRPr sz="3600" kern="1200">
-                <a:solidFill>
-                  <a:schemeClr val="dk1"/>
-                </a:solidFill>
-                <a:latin typeface="+mn-lt"/>
-                <a:ea typeface="+mn-ea"/>
-                <a:cs typeface="+mn-cs"/>
-              </a:defRPr>
-            </a:lvl1pPr>
-            <a:lvl2pPr eaLnBrk="1" hangingPunct="1">
-              <a:defRPr>
-                <a:solidFill>
-                  <a:schemeClr val="dk1"/>
-                </a:solidFill>
-                <a:latin typeface="+mn-lt"/>
-                <a:ea typeface="+mn-ea"/>
-                <a:cs typeface="+mn-cs"/>
-              </a:defRPr>
-            </a:lvl2pPr>
-            <a:lvl3pPr eaLnBrk="1" hangingPunct="1">
-              <a:defRPr>
-                <a:solidFill>
-                  <a:schemeClr val="dk1"/>
-                </a:solidFill>
-                <a:latin typeface="+mn-lt"/>
-                <a:ea typeface="+mn-ea"/>
-                <a:cs typeface="+mn-cs"/>
-              </a:defRPr>
-            </a:lvl3pPr>
-            <a:lvl4pPr eaLnBrk="1" hangingPunct="1">
-              <a:defRPr>
-                <a:solidFill>
-                  <a:schemeClr val="dk1"/>
-                </a:solidFill>
-                <a:latin typeface="+mn-lt"/>
-                <a:ea typeface="+mn-ea"/>
-                <a:cs typeface="+mn-cs"/>
-              </a:defRPr>
-            </a:lvl4pPr>
-            <a:lvl5pPr eaLnBrk="1" hangingPunct="1">
-              <a:defRPr>
-                <a:solidFill>
-                  <a:schemeClr val="dk1"/>
-                </a:solidFill>
-                <a:latin typeface="+mn-lt"/>
-                <a:ea typeface="+mn-ea"/>
-                <a:cs typeface="+mn-cs"/>
-              </a:defRPr>
-            </a:lvl5pPr>
-            <a:lvl6pPr eaLnBrk="1" hangingPunct="1">
-              <a:defRPr>
-                <a:solidFill>
-                  <a:schemeClr val="dk1"/>
-                </a:solidFill>
-                <a:latin typeface="+mn-lt"/>
-                <a:ea typeface="+mn-ea"/>
-                <a:cs typeface="+mn-cs"/>
-              </a:defRPr>
-            </a:lvl6pPr>
-            <a:lvl7pPr eaLnBrk="1" hangingPunct="1">
-              <a:defRPr>
-                <a:solidFill>
-                  <a:schemeClr val="dk1"/>
-                </a:solidFill>
-                <a:latin typeface="+mn-lt"/>
-                <a:ea typeface="+mn-ea"/>
-                <a:cs typeface="+mn-cs"/>
-              </a:defRPr>
-            </a:lvl7pPr>
-            <a:lvl8pPr eaLnBrk="1" hangingPunct="1">
-              <a:defRPr>
-                <a:solidFill>
-                  <a:schemeClr val="dk1"/>
-                </a:solidFill>
-                <a:latin typeface="+mn-lt"/>
-                <a:ea typeface="+mn-ea"/>
-                <a:cs typeface="+mn-cs"/>
-              </a:defRPr>
-            </a:lvl8pPr>
-            <a:lvl9pPr eaLnBrk="1" hangingPunct="1">
-              <a:defRPr>
-                <a:solidFill>
-                  <a:schemeClr val="dk1"/>
-                </a:solidFill>
-                <a:latin typeface="+mn-lt"/>
-                <a:ea typeface="+mn-ea"/>
-                <a:cs typeface="+mn-cs"/>
-              </a:defRPr>
-            </a:lvl9pPr>
-          </a:lstStyle>
-          <a:p>
-            <a:r>
-              <a:rPr lang="fr-FR" sz="2400" dirty="0">
-                <a:ln w="0"/>
-                <a:solidFill>
-                  <a:schemeClr val="tx1"/>
-                </a:solidFill>
-                <a:effectLst>
-                  <a:outerShdw blurRad="38100" dist="19050" dir="2700000" algn="tl" rotWithShape="0">
-                    <a:schemeClr val="dk1">
-                      <a:alpha val="40000"/>
-                    </a:schemeClr>
-                  </a:outerShdw>
-                </a:effectLst>
-                <a:latin typeface="Copperplate Gothic Bold" panose="020E0705020206020404" pitchFamily="34" charset="0"/>
-              </a:rPr>
-              <a:t>Visualisation de l’historique de discussion</a:t>
-            </a:r>
-          </a:p>
-        </p:txBody>
-      </p:sp>
-    </p:spTree>
-    <p:extLst>
-      <p:ext uri="{BB962C8B-B14F-4D97-AF65-F5344CB8AC3E}">
-        <p14:creationId xmlns:p14="http://schemas.microsoft.com/office/powerpoint/2010/main" val="1622528497"/>
       </p:ext>
     </p:extLst>
   </p:cSld>

--- a/docs/DEMO.pptx
+++ b/docs/DEMO.pptx
@@ -16,7 +16,8 @@
     <p:sldId id="263" r:id="rId10"/>
     <p:sldId id="265" r:id="rId11"/>
     <p:sldId id="264" r:id="rId12"/>
-    <p:sldId id="267" r:id="rId13"/>
+    <p:sldId id="269" r:id="rId13"/>
+    <p:sldId id="267" r:id="rId14"/>
   </p:sldIdLst>
   <p:sldSz cx="12192000" cy="6858000"/>
   <p:notesSz cx="6858000" cy="9144000"/>
@@ -9335,6 +9336,65 @@
       </p:grpSpPr>
       <p:pic>
         <p:nvPicPr>
+          <p:cNvPr id="5" name="Image 4">
+            <a:extLst>
+              <a:ext uri="{FF2B5EF4-FFF2-40B4-BE49-F238E27FC236}">
+                <a16:creationId xmlns:a16="http://schemas.microsoft.com/office/drawing/2014/main" id="{E3020DC6-45B7-4E36-B222-1B45E6455339}"/>
+              </a:ext>
+            </a:extLst>
+          </p:cNvPr>
+          <p:cNvPicPr>
+            <a:picLocks noChangeAspect="1"/>
+          </p:cNvPicPr>
+          <p:nvPr/>
+        </p:nvPicPr>
+        <p:blipFill rotWithShape="1">
+          <a:blip r:embed="rId2"/>
+          <a:srcRect l="474" t="13293"/>
+          <a:stretch/>
+        </p:blipFill>
+        <p:spPr>
+          <a:xfrm>
+            <a:off x="0" y="-1"/>
+            <a:ext cx="12192000" cy="6858001"/>
+          </a:xfrm>
+          <a:prstGeom prst="rect">
+            <a:avLst/>
+          </a:prstGeom>
+        </p:spPr>
+      </p:pic>
+    </p:spTree>
+    <p:extLst>
+      <p:ext uri="{BB962C8B-B14F-4D97-AF65-F5344CB8AC3E}">
+        <p14:creationId xmlns:p14="http://schemas.microsoft.com/office/powerpoint/2010/main" val="1959305102"/>
+      </p:ext>
+    </p:extLst>
+  </p:cSld>
+  <p:clrMapOvr>
+    <a:masterClrMapping/>
+  </p:clrMapOvr>
+</p:sld>
+</file>
+
+<file path=ppt/slides/slide13.xml><?xml version="1.0" encoding="utf-8"?>
+<p:sld xmlns:a="http://schemas.openxmlformats.org/drawingml/2006/main" xmlns:r="http://schemas.openxmlformats.org/officeDocument/2006/relationships" xmlns:p="http://schemas.openxmlformats.org/presentationml/2006/main">
+  <p:cSld>
+    <p:spTree>
+      <p:nvGrpSpPr>
+        <p:cNvPr id="1" name=""/>
+        <p:cNvGrpSpPr/>
+        <p:nvPr/>
+      </p:nvGrpSpPr>
+      <p:grpSpPr>
+        <a:xfrm>
+          <a:off x="0" y="0"/>
+          <a:ext cx="0" cy="0"/>
+          <a:chOff x="0" y="0"/>
+          <a:chExt cx="0" cy="0"/>
+        </a:xfrm>
+      </p:grpSpPr>
+      <p:pic>
+        <p:nvPicPr>
           <p:cNvPr id="1027" name="Picture 3">
             <a:extLst>
               <a:ext uri="{FF2B5EF4-FFF2-40B4-BE49-F238E27FC236}">
